--- a/synthetic-image-classification/presentation.pptx
+++ b/synthetic-image-classification/presentation.pptx
@@ -1867,7 +1867,7 @@
           <a:p>
             <a:fld id="{D04591F4-2B18-4616-B0B8-CEA3AD158FA5}" type="datetimeFigureOut">
               <a:rPr lang="en-GB" smtClean="0"/>
-              <a:t>01/06/2023</a:t>
+              <a:t>08/09/2026</a:t>
             </a:fld>
             <a:endParaRPr lang="en-GB"/>
           </a:p>
@@ -2550,7 +2550,7 @@
           <a:p>
             <a:fld id="{9E1725B0-2DB5-4215-8DED-04A45F91373E}" type="datetime1">
               <a:rPr lang="en-GB" smtClean="0"/>
-              <a:t>01/06/2023</a:t>
+              <a:t>08/09/2026</a:t>
             </a:fld>
             <a:endParaRPr lang="en-GB"/>
           </a:p>
@@ -2750,7 +2750,7 @@
           <a:p>
             <a:fld id="{53572C5C-1378-4C1B-BA1C-1D8506ED235E}" type="datetime1">
               <a:rPr lang="en-GB" smtClean="0"/>
-              <a:t>01/06/2023</a:t>
+              <a:t>08/09/2026</a:t>
             </a:fld>
             <a:endParaRPr lang="en-GB"/>
           </a:p>
@@ -2960,7 +2960,7 @@
           <a:p>
             <a:fld id="{01312249-05F5-48B8-AD6E-F258536AEA1A}" type="datetime1">
               <a:rPr lang="en-GB" smtClean="0"/>
-              <a:t>01/06/2023</a:t>
+              <a:t>08/09/2026</a:t>
             </a:fld>
             <a:endParaRPr lang="en-GB"/>
           </a:p>
@@ -3160,7 +3160,7 @@
           <a:p>
             <a:fld id="{4443DC48-3DF5-413C-A51D-DA54C7AF17E0}" type="datetime1">
               <a:rPr lang="en-GB" smtClean="0"/>
-              <a:t>01/06/2023</a:t>
+              <a:t>08/09/2026</a:t>
             </a:fld>
             <a:endParaRPr lang="en-GB"/>
           </a:p>
@@ -3436,7 +3436,7 @@
           <a:p>
             <a:fld id="{DEE14277-BB84-4A0F-82A7-B354A8E8F33F}" type="datetime1">
               <a:rPr lang="en-GB" smtClean="0"/>
-              <a:t>01/06/2023</a:t>
+              <a:t>08/09/2026</a:t>
             </a:fld>
             <a:endParaRPr lang="en-GB"/>
           </a:p>
@@ -3704,7 +3704,7 @@
           <a:p>
             <a:fld id="{FB03BD61-B35F-4AB7-A8B5-2FD65B3CDBDE}" type="datetime1">
               <a:rPr lang="en-GB" smtClean="0"/>
-              <a:t>01/06/2023</a:t>
+              <a:t>08/09/2026</a:t>
             </a:fld>
             <a:endParaRPr lang="en-GB"/>
           </a:p>
@@ -4119,7 +4119,7 @@
           <a:p>
             <a:fld id="{0F203D44-20CD-42F1-8C43-DD61DE00A7E3}" type="datetime1">
               <a:rPr lang="en-GB" smtClean="0"/>
-              <a:t>01/06/2023</a:t>
+              <a:t>08/09/2026</a:t>
             </a:fld>
             <a:endParaRPr lang="en-GB"/>
           </a:p>
@@ -4261,7 +4261,7 @@
           <a:p>
             <a:fld id="{43D8CB3A-8A88-4866-93F8-42333A27DCEC}" type="datetime1">
               <a:rPr lang="en-GB" smtClean="0"/>
-              <a:t>01/06/2023</a:t>
+              <a:t>08/09/2026</a:t>
             </a:fld>
             <a:endParaRPr lang="en-GB"/>
           </a:p>
@@ -4374,7 +4374,7 @@
           <a:p>
             <a:fld id="{2A98556B-18A6-4FBB-B1FC-3E96403E41C8}" type="datetime1">
               <a:rPr lang="en-GB" smtClean="0"/>
-              <a:t>01/06/2023</a:t>
+              <a:t>08/09/2026</a:t>
             </a:fld>
             <a:endParaRPr lang="en-GB"/>
           </a:p>
@@ -4687,7 +4687,7 @@
           <a:p>
             <a:fld id="{BD2F4A2B-4046-4BF9-A1CD-86911B703D7D}" type="datetime1">
               <a:rPr lang="en-GB" smtClean="0"/>
-              <a:t>01/06/2023</a:t>
+              <a:t>08/09/2026</a:t>
             </a:fld>
             <a:endParaRPr lang="en-GB"/>
           </a:p>
@@ -4976,7 +4976,7 @@
           <a:p>
             <a:fld id="{ACE4F9C8-F293-419D-BF6E-FEEAE13CB8CE}" type="datetime1">
               <a:rPr lang="en-GB" smtClean="0"/>
-              <a:t>01/06/2023</a:t>
+              <a:t>08/09/2026</a:t>
             </a:fld>
             <a:endParaRPr lang="en-GB"/>
           </a:p>
@@ -5219,7 +5219,7 @@
           <a:p>
             <a:fld id="{E58EC4B4-785F-4E96-B2EA-541AF5D2D897}" type="datetime1">
               <a:rPr lang="en-GB" smtClean="0"/>
-              <a:t>01/06/2023</a:t>
+              <a:t>08/09/2026</a:t>
             </a:fld>
             <a:endParaRPr lang="en-GB"/>
           </a:p>
@@ -5897,263 +5897,263 @@
           <a:custGeom>
             <a:avLst/>
             <a:gdLst>
-              <a:gd name="connsiteX0" fmla="*/ 0 w 10515600"/>
-              <a:gd name="connsiteY0" fmla="*/ 0 h 5416094"/>
-              <a:gd name="connsiteX1" fmla="*/ 552069 w 10515600"/>
-              <a:gd name="connsiteY1" fmla="*/ 0 h 5416094"/>
-              <a:gd name="connsiteX2" fmla="*/ 893826 w 10515600"/>
-              <a:gd name="connsiteY2" fmla="*/ 0 h 5416094"/>
-              <a:gd name="connsiteX3" fmla="*/ 1761363 w 10515600"/>
-              <a:gd name="connsiteY3" fmla="*/ 0 h 5416094"/>
-              <a:gd name="connsiteX4" fmla="*/ 2313432 w 10515600"/>
-              <a:gd name="connsiteY4" fmla="*/ 0 h 5416094"/>
-              <a:gd name="connsiteX5" fmla="*/ 2865501 w 10515600"/>
-              <a:gd name="connsiteY5" fmla="*/ 0 h 5416094"/>
-              <a:gd name="connsiteX6" fmla="*/ 3733038 w 10515600"/>
-              <a:gd name="connsiteY6" fmla="*/ 0 h 5416094"/>
-              <a:gd name="connsiteX7" fmla="*/ 4179951 w 10515600"/>
-              <a:gd name="connsiteY7" fmla="*/ 0 h 5416094"/>
-              <a:gd name="connsiteX8" fmla="*/ 5047488 w 10515600"/>
-              <a:gd name="connsiteY8" fmla="*/ 0 h 5416094"/>
-              <a:gd name="connsiteX9" fmla="*/ 5915025 w 10515600"/>
-              <a:gd name="connsiteY9" fmla="*/ 0 h 5416094"/>
-              <a:gd name="connsiteX10" fmla="*/ 6572250 w 10515600"/>
-              <a:gd name="connsiteY10" fmla="*/ 0 h 5416094"/>
-              <a:gd name="connsiteX11" fmla="*/ 7439787 w 10515600"/>
-              <a:gd name="connsiteY11" fmla="*/ 0 h 5416094"/>
-              <a:gd name="connsiteX12" fmla="*/ 7991856 w 10515600"/>
-              <a:gd name="connsiteY12" fmla="*/ 0 h 5416094"/>
-              <a:gd name="connsiteX13" fmla="*/ 8543925 w 10515600"/>
-              <a:gd name="connsiteY13" fmla="*/ 0 h 5416094"/>
-              <a:gd name="connsiteX14" fmla="*/ 9306306 w 10515600"/>
-              <a:gd name="connsiteY14" fmla="*/ 0 h 5416094"/>
-              <a:gd name="connsiteX15" fmla="*/ 9858375 w 10515600"/>
-              <a:gd name="connsiteY15" fmla="*/ 0 h 5416094"/>
-              <a:gd name="connsiteX16" fmla="*/ 10515600 w 10515600"/>
-              <a:gd name="connsiteY16" fmla="*/ 0 h 5416094"/>
-              <a:gd name="connsiteX17" fmla="*/ 10515600 w 10515600"/>
-              <a:gd name="connsiteY17" fmla="*/ 785334 h 5416094"/>
-              <a:gd name="connsiteX18" fmla="*/ 10515600 w 10515600"/>
-              <a:gd name="connsiteY18" fmla="*/ 1516506 h 5416094"/>
-              <a:gd name="connsiteX19" fmla="*/ 10515600 w 10515600"/>
-              <a:gd name="connsiteY19" fmla="*/ 2247679 h 5416094"/>
-              <a:gd name="connsiteX20" fmla="*/ 10515600 w 10515600"/>
-              <a:gd name="connsiteY20" fmla="*/ 2762208 h 5416094"/>
-              <a:gd name="connsiteX21" fmla="*/ 10515600 w 10515600"/>
-              <a:gd name="connsiteY21" fmla="*/ 3330898 h 5416094"/>
-              <a:gd name="connsiteX22" fmla="*/ 10515600 w 10515600"/>
-              <a:gd name="connsiteY22" fmla="*/ 4062071 h 5416094"/>
-              <a:gd name="connsiteX23" fmla="*/ 10515600 w 10515600"/>
-              <a:gd name="connsiteY23" fmla="*/ 4684921 h 5416094"/>
-              <a:gd name="connsiteX24" fmla="*/ 10515600 w 10515600"/>
-              <a:gd name="connsiteY24" fmla="*/ 5416094 h 5416094"/>
-              <a:gd name="connsiteX25" fmla="*/ 9753219 w 10515600"/>
-              <a:gd name="connsiteY25" fmla="*/ 5416094 h 5416094"/>
-              <a:gd name="connsiteX26" fmla="*/ 9411462 w 10515600"/>
-              <a:gd name="connsiteY26" fmla="*/ 5416094 h 5416094"/>
-              <a:gd name="connsiteX27" fmla="*/ 8754237 w 10515600"/>
-              <a:gd name="connsiteY27" fmla="*/ 5416094 h 5416094"/>
-              <a:gd name="connsiteX28" fmla="*/ 8307324 w 10515600"/>
-              <a:gd name="connsiteY28" fmla="*/ 5416094 h 5416094"/>
-              <a:gd name="connsiteX29" fmla="*/ 7544943 w 10515600"/>
-              <a:gd name="connsiteY29" fmla="*/ 5416094 h 5416094"/>
-              <a:gd name="connsiteX30" fmla="*/ 7098030 w 10515600"/>
-              <a:gd name="connsiteY30" fmla="*/ 5416094 h 5416094"/>
-              <a:gd name="connsiteX31" fmla="*/ 6335649 w 10515600"/>
-              <a:gd name="connsiteY31" fmla="*/ 5416094 h 5416094"/>
-              <a:gd name="connsiteX32" fmla="*/ 5993892 w 10515600"/>
-              <a:gd name="connsiteY32" fmla="*/ 5416094 h 5416094"/>
-              <a:gd name="connsiteX33" fmla="*/ 5231511 w 10515600"/>
-              <a:gd name="connsiteY33" fmla="*/ 5416094 h 5416094"/>
-              <a:gd name="connsiteX34" fmla="*/ 4784598 w 10515600"/>
-              <a:gd name="connsiteY34" fmla="*/ 5416094 h 5416094"/>
-              <a:gd name="connsiteX35" fmla="*/ 4442841 w 10515600"/>
-              <a:gd name="connsiteY35" fmla="*/ 5416094 h 5416094"/>
-              <a:gd name="connsiteX36" fmla="*/ 3995928 w 10515600"/>
-              <a:gd name="connsiteY36" fmla="*/ 5416094 h 5416094"/>
-              <a:gd name="connsiteX37" fmla="*/ 3233547 w 10515600"/>
-              <a:gd name="connsiteY37" fmla="*/ 5416094 h 5416094"/>
-              <a:gd name="connsiteX38" fmla="*/ 2786634 w 10515600"/>
-              <a:gd name="connsiteY38" fmla="*/ 5416094 h 5416094"/>
-              <a:gd name="connsiteX39" fmla="*/ 2444877 w 10515600"/>
-              <a:gd name="connsiteY39" fmla="*/ 5416094 h 5416094"/>
-              <a:gd name="connsiteX40" fmla="*/ 1997964 w 10515600"/>
-              <a:gd name="connsiteY40" fmla="*/ 5416094 h 5416094"/>
-              <a:gd name="connsiteX41" fmla="*/ 1445895 w 10515600"/>
-              <a:gd name="connsiteY41" fmla="*/ 5416094 h 5416094"/>
-              <a:gd name="connsiteX42" fmla="*/ 788670 w 10515600"/>
-              <a:gd name="connsiteY42" fmla="*/ 5416094 h 5416094"/>
-              <a:gd name="connsiteX43" fmla="*/ 0 w 10515600"/>
-              <a:gd name="connsiteY43" fmla="*/ 5416094 h 5416094"/>
-              <a:gd name="connsiteX44" fmla="*/ 0 w 10515600"/>
-              <a:gd name="connsiteY44" fmla="*/ 4630760 h 5416094"/>
-              <a:gd name="connsiteX45" fmla="*/ 0 w 10515600"/>
-              <a:gd name="connsiteY45" fmla="*/ 3953749 h 5416094"/>
-              <a:gd name="connsiteX46" fmla="*/ 0 w 10515600"/>
-              <a:gd name="connsiteY46" fmla="*/ 3276737 h 5416094"/>
-              <a:gd name="connsiteX47" fmla="*/ 0 w 10515600"/>
-              <a:gd name="connsiteY47" fmla="*/ 2599725 h 5416094"/>
-              <a:gd name="connsiteX48" fmla="*/ 0 w 10515600"/>
-              <a:gd name="connsiteY48" fmla="*/ 1922713 h 5416094"/>
-              <a:gd name="connsiteX49" fmla="*/ 0 w 10515600"/>
-              <a:gd name="connsiteY49" fmla="*/ 1299863 h 5416094"/>
-              <a:gd name="connsiteX50" fmla="*/ 0 w 10515600"/>
-              <a:gd name="connsiteY50" fmla="*/ 0 h 5416094"/>
+              <a:gd name="csX0" fmla="*/ 0 w 10515600"/>
+              <a:gd name="csY0" fmla="*/ 0 h 5416094"/>
+              <a:gd name="csX1" fmla="*/ 552069 w 10515600"/>
+              <a:gd name="csY1" fmla="*/ 0 h 5416094"/>
+              <a:gd name="csX2" fmla="*/ 893826 w 10515600"/>
+              <a:gd name="csY2" fmla="*/ 0 h 5416094"/>
+              <a:gd name="csX3" fmla="*/ 1761363 w 10515600"/>
+              <a:gd name="csY3" fmla="*/ 0 h 5416094"/>
+              <a:gd name="csX4" fmla="*/ 2313432 w 10515600"/>
+              <a:gd name="csY4" fmla="*/ 0 h 5416094"/>
+              <a:gd name="csX5" fmla="*/ 2865501 w 10515600"/>
+              <a:gd name="csY5" fmla="*/ 0 h 5416094"/>
+              <a:gd name="csX6" fmla="*/ 3733038 w 10515600"/>
+              <a:gd name="csY6" fmla="*/ 0 h 5416094"/>
+              <a:gd name="csX7" fmla="*/ 4179951 w 10515600"/>
+              <a:gd name="csY7" fmla="*/ 0 h 5416094"/>
+              <a:gd name="csX8" fmla="*/ 5047488 w 10515600"/>
+              <a:gd name="csY8" fmla="*/ 0 h 5416094"/>
+              <a:gd name="csX9" fmla="*/ 5915025 w 10515600"/>
+              <a:gd name="csY9" fmla="*/ 0 h 5416094"/>
+              <a:gd name="csX10" fmla="*/ 6572250 w 10515600"/>
+              <a:gd name="csY10" fmla="*/ 0 h 5416094"/>
+              <a:gd name="csX11" fmla="*/ 7439787 w 10515600"/>
+              <a:gd name="csY11" fmla="*/ 0 h 5416094"/>
+              <a:gd name="csX12" fmla="*/ 7991856 w 10515600"/>
+              <a:gd name="csY12" fmla="*/ 0 h 5416094"/>
+              <a:gd name="csX13" fmla="*/ 8543925 w 10515600"/>
+              <a:gd name="csY13" fmla="*/ 0 h 5416094"/>
+              <a:gd name="csX14" fmla="*/ 9306306 w 10515600"/>
+              <a:gd name="csY14" fmla="*/ 0 h 5416094"/>
+              <a:gd name="csX15" fmla="*/ 9858375 w 10515600"/>
+              <a:gd name="csY15" fmla="*/ 0 h 5416094"/>
+              <a:gd name="csX16" fmla="*/ 10515600 w 10515600"/>
+              <a:gd name="csY16" fmla="*/ 0 h 5416094"/>
+              <a:gd name="csX17" fmla="*/ 10515600 w 10515600"/>
+              <a:gd name="csY17" fmla="*/ 785334 h 5416094"/>
+              <a:gd name="csX18" fmla="*/ 10515600 w 10515600"/>
+              <a:gd name="csY18" fmla="*/ 1516506 h 5416094"/>
+              <a:gd name="csX19" fmla="*/ 10515600 w 10515600"/>
+              <a:gd name="csY19" fmla="*/ 2247679 h 5416094"/>
+              <a:gd name="csX20" fmla="*/ 10515600 w 10515600"/>
+              <a:gd name="csY20" fmla="*/ 2762208 h 5416094"/>
+              <a:gd name="csX21" fmla="*/ 10515600 w 10515600"/>
+              <a:gd name="csY21" fmla="*/ 3330898 h 5416094"/>
+              <a:gd name="csX22" fmla="*/ 10515600 w 10515600"/>
+              <a:gd name="csY22" fmla="*/ 4062071 h 5416094"/>
+              <a:gd name="csX23" fmla="*/ 10515600 w 10515600"/>
+              <a:gd name="csY23" fmla="*/ 4684921 h 5416094"/>
+              <a:gd name="csX24" fmla="*/ 10515600 w 10515600"/>
+              <a:gd name="csY24" fmla="*/ 5416094 h 5416094"/>
+              <a:gd name="csX25" fmla="*/ 9753219 w 10515600"/>
+              <a:gd name="csY25" fmla="*/ 5416094 h 5416094"/>
+              <a:gd name="csX26" fmla="*/ 9411462 w 10515600"/>
+              <a:gd name="csY26" fmla="*/ 5416094 h 5416094"/>
+              <a:gd name="csX27" fmla="*/ 8754237 w 10515600"/>
+              <a:gd name="csY27" fmla="*/ 5416094 h 5416094"/>
+              <a:gd name="csX28" fmla="*/ 8307324 w 10515600"/>
+              <a:gd name="csY28" fmla="*/ 5416094 h 5416094"/>
+              <a:gd name="csX29" fmla="*/ 7544943 w 10515600"/>
+              <a:gd name="csY29" fmla="*/ 5416094 h 5416094"/>
+              <a:gd name="csX30" fmla="*/ 7098030 w 10515600"/>
+              <a:gd name="csY30" fmla="*/ 5416094 h 5416094"/>
+              <a:gd name="csX31" fmla="*/ 6335649 w 10515600"/>
+              <a:gd name="csY31" fmla="*/ 5416094 h 5416094"/>
+              <a:gd name="csX32" fmla="*/ 5993892 w 10515600"/>
+              <a:gd name="csY32" fmla="*/ 5416094 h 5416094"/>
+              <a:gd name="csX33" fmla="*/ 5231511 w 10515600"/>
+              <a:gd name="csY33" fmla="*/ 5416094 h 5416094"/>
+              <a:gd name="csX34" fmla="*/ 4784598 w 10515600"/>
+              <a:gd name="csY34" fmla="*/ 5416094 h 5416094"/>
+              <a:gd name="csX35" fmla="*/ 4442841 w 10515600"/>
+              <a:gd name="csY35" fmla="*/ 5416094 h 5416094"/>
+              <a:gd name="csX36" fmla="*/ 3995928 w 10515600"/>
+              <a:gd name="csY36" fmla="*/ 5416094 h 5416094"/>
+              <a:gd name="csX37" fmla="*/ 3233547 w 10515600"/>
+              <a:gd name="csY37" fmla="*/ 5416094 h 5416094"/>
+              <a:gd name="csX38" fmla="*/ 2786634 w 10515600"/>
+              <a:gd name="csY38" fmla="*/ 5416094 h 5416094"/>
+              <a:gd name="csX39" fmla="*/ 2444877 w 10515600"/>
+              <a:gd name="csY39" fmla="*/ 5416094 h 5416094"/>
+              <a:gd name="csX40" fmla="*/ 1997964 w 10515600"/>
+              <a:gd name="csY40" fmla="*/ 5416094 h 5416094"/>
+              <a:gd name="csX41" fmla="*/ 1445895 w 10515600"/>
+              <a:gd name="csY41" fmla="*/ 5416094 h 5416094"/>
+              <a:gd name="csX42" fmla="*/ 788670 w 10515600"/>
+              <a:gd name="csY42" fmla="*/ 5416094 h 5416094"/>
+              <a:gd name="csX43" fmla="*/ 0 w 10515600"/>
+              <a:gd name="csY43" fmla="*/ 5416094 h 5416094"/>
+              <a:gd name="csX44" fmla="*/ 0 w 10515600"/>
+              <a:gd name="csY44" fmla="*/ 4630760 h 5416094"/>
+              <a:gd name="csX45" fmla="*/ 0 w 10515600"/>
+              <a:gd name="csY45" fmla="*/ 3953749 h 5416094"/>
+              <a:gd name="csX46" fmla="*/ 0 w 10515600"/>
+              <a:gd name="csY46" fmla="*/ 3276737 h 5416094"/>
+              <a:gd name="csX47" fmla="*/ 0 w 10515600"/>
+              <a:gd name="csY47" fmla="*/ 2599725 h 5416094"/>
+              <a:gd name="csX48" fmla="*/ 0 w 10515600"/>
+              <a:gd name="csY48" fmla="*/ 1922713 h 5416094"/>
+              <a:gd name="csX49" fmla="*/ 0 w 10515600"/>
+              <a:gd name="csY49" fmla="*/ 1299863 h 5416094"/>
+              <a:gd name="csX50" fmla="*/ 0 w 10515600"/>
+              <a:gd name="csY50" fmla="*/ 0 h 5416094"/>
             </a:gdLst>
             <a:ahLst/>
             <a:cxnLst>
               <a:cxn ang="0">
-                <a:pos x="connsiteX0" y="connsiteY0"/>
-              </a:cxn>
-              <a:cxn ang="0">
-                <a:pos x="connsiteX1" y="connsiteY1"/>
-              </a:cxn>
-              <a:cxn ang="0">
-                <a:pos x="connsiteX2" y="connsiteY2"/>
-              </a:cxn>
-              <a:cxn ang="0">
-                <a:pos x="connsiteX3" y="connsiteY3"/>
-              </a:cxn>
-              <a:cxn ang="0">
-                <a:pos x="connsiteX4" y="connsiteY4"/>
-              </a:cxn>
-              <a:cxn ang="0">
-                <a:pos x="connsiteX5" y="connsiteY5"/>
-              </a:cxn>
-              <a:cxn ang="0">
-                <a:pos x="connsiteX6" y="connsiteY6"/>
-              </a:cxn>
-              <a:cxn ang="0">
-                <a:pos x="connsiteX7" y="connsiteY7"/>
-              </a:cxn>
-              <a:cxn ang="0">
-                <a:pos x="connsiteX8" y="connsiteY8"/>
-              </a:cxn>
-              <a:cxn ang="0">
-                <a:pos x="connsiteX9" y="connsiteY9"/>
-              </a:cxn>
-              <a:cxn ang="0">
-                <a:pos x="connsiteX10" y="connsiteY10"/>
-              </a:cxn>
-              <a:cxn ang="0">
-                <a:pos x="connsiteX11" y="connsiteY11"/>
-              </a:cxn>
-              <a:cxn ang="0">
-                <a:pos x="connsiteX12" y="connsiteY12"/>
-              </a:cxn>
-              <a:cxn ang="0">
-                <a:pos x="connsiteX13" y="connsiteY13"/>
-              </a:cxn>
-              <a:cxn ang="0">
-                <a:pos x="connsiteX14" y="connsiteY14"/>
-              </a:cxn>
-              <a:cxn ang="0">
-                <a:pos x="connsiteX15" y="connsiteY15"/>
-              </a:cxn>
-              <a:cxn ang="0">
-                <a:pos x="connsiteX16" y="connsiteY16"/>
-              </a:cxn>
-              <a:cxn ang="0">
-                <a:pos x="connsiteX17" y="connsiteY17"/>
-              </a:cxn>
-              <a:cxn ang="0">
-                <a:pos x="connsiteX18" y="connsiteY18"/>
-              </a:cxn>
-              <a:cxn ang="0">
-                <a:pos x="connsiteX19" y="connsiteY19"/>
-              </a:cxn>
-              <a:cxn ang="0">
-                <a:pos x="connsiteX20" y="connsiteY20"/>
-              </a:cxn>
-              <a:cxn ang="0">
-                <a:pos x="connsiteX21" y="connsiteY21"/>
-              </a:cxn>
-              <a:cxn ang="0">
-                <a:pos x="connsiteX22" y="connsiteY22"/>
-              </a:cxn>
-              <a:cxn ang="0">
-                <a:pos x="connsiteX23" y="connsiteY23"/>
-              </a:cxn>
-              <a:cxn ang="0">
-                <a:pos x="connsiteX24" y="connsiteY24"/>
-              </a:cxn>
-              <a:cxn ang="0">
-                <a:pos x="connsiteX25" y="connsiteY25"/>
-              </a:cxn>
-              <a:cxn ang="0">
-                <a:pos x="connsiteX26" y="connsiteY26"/>
-              </a:cxn>
-              <a:cxn ang="0">
-                <a:pos x="connsiteX27" y="connsiteY27"/>
-              </a:cxn>
-              <a:cxn ang="0">
-                <a:pos x="connsiteX28" y="connsiteY28"/>
-              </a:cxn>
-              <a:cxn ang="0">
-                <a:pos x="connsiteX29" y="connsiteY29"/>
-              </a:cxn>
-              <a:cxn ang="0">
-                <a:pos x="connsiteX30" y="connsiteY30"/>
-              </a:cxn>
-              <a:cxn ang="0">
-                <a:pos x="connsiteX31" y="connsiteY31"/>
-              </a:cxn>
-              <a:cxn ang="0">
-                <a:pos x="connsiteX32" y="connsiteY32"/>
-              </a:cxn>
-              <a:cxn ang="0">
-                <a:pos x="connsiteX33" y="connsiteY33"/>
-              </a:cxn>
-              <a:cxn ang="0">
-                <a:pos x="connsiteX34" y="connsiteY34"/>
-              </a:cxn>
-              <a:cxn ang="0">
-                <a:pos x="connsiteX35" y="connsiteY35"/>
-              </a:cxn>
-              <a:cxn ang="0">
-                <a:pos x="connsiteX36" y="connsiteY36"/>
-              </a:cxn>
-              <a:cxn ang="0">
-                <a:pos x="connsiteX37" y="connsiteY37"/>
-              </a:cxn>
-              <a:cxn ang="0">
-                <a:pos x="connsiteX38" y="connsiteY38"/>
-              </a:cxn>
-              <a:cxn ang="0">
-                <a:pos x="connsiteX39" y="connsiteY39"/>
-              </a:cxn>
-              <a:cxn ang="0">
-                <a:pos x="connsiteX40" y="connsiteY40"/>
-              </a:cxn>
-              <a:cxn ang="0">
-                <a:pos x="connsiteX41" y="connsiteY41"/>
-              </a:cxn>
-              <a:cxn ang="0">
-                <a:pos x="connsiteX42" y="connsiteY42"/>
-              </a:cxn>
-              <a:cxn ang="0">
-                <a:pos x="connsiteX43" y="connsiteY43"/>
-              </a:cxn>
-              <a:cxn ang="0">
-                <a:pos x="connsiteX44" y="connsiteY44"/>
-              </a:cxn>
-              <a:cxn ang="0">
-                <a:pos x="connsiteX45" y="connsiteY45"/>
-              </a:cxn>
-              <a:cxn ang="0">
-                <a:pos x="connsiteX46" y="connsiteY46"/>
-              </a:cxn>
-              <a:cxn ang="0">
-                <a:pos x="connsiteX47" y="connsiteY47"/>
-              </a:cxn>
-              <a:cxn ang="0">
-                <a:pos x="connsiteX48" y="connsiteY48"/>
-              </a:cxn>
-              <a:cxn ang="0">
-                <a:pos x="connsiteX49" y="connsiteY49"/>
-              </a:cxn>
-              <a:cxn ang="0">
-                <a:pos x="connsiteX50" y="connsiteY50"/>
+                <a:pos x="csX0" y="csY0"/>
+              </a:cxn>
+              <a:cxn ang="0">
+                <a:pos x="csX1" y="csY1"/>
+              </a:cxn>
+              <a:cxn ang="0">
+                <a:pos x="csX2" y="csY2"/>
+              </a:cxn>
+              <a:cxn ang="0">
+                <a:pos x="csX3" y="csY3"/>
+              </a:cxn>
+              <a:cxn ang="0">
+                <a:pos x="csX4" y="csY4"/>
+              </a:cxn>
+              <a:cxn ang="0">
+                <a:pos x="csX5" y="csY5"/>
+              </a:cxn>
+              <a:cxn ang="0">
+                <a:pos x="csX6" y="csY6"/>
+              </a:cxn>
+              <a:cxn ang="0">
+                <a:pos x="csX7" y="csY7"/>
+              </a:cxn>
+              <a:cxn ang="0">
+                <a:pos x="csX8" y="csY8"/>
+              </a:cxn>
+              <a:cxn ang="0">
+                <a:pos x="csX9" y="csY9"/>
+              </a:cxn>
+              <a:cxn ang="0">
+                <a:pos x="csX10" y="csY10"/>
+              </a:cxn>
+              <a:cxn ang="0">
+                <a:pos x="csX11" y="csY11"/>
+              </a:cxn>
+              <a:cxn ang="0">
+                <a:pos x="csX12" y="csY12"/>
+              </a:cxn>
+              <a:cxn ang="0">
+                <a:pos x="csX13" y="csY13"/>
+              </a:cxn>
+              <a:cxn ang="0">
+                <a:pos x="csX14" y="csY14"/>
+              </a:cxn>
+              <a:cxn ang="0">
+                <a:pos x="csX15" y="csY15"/>
+              </a:cxn>
+              <a:cxn ang="0">
+                <a:pos x="csX16" y="csY16"/>
+              </a:cxn>
+              <a:cxn ang="0">
+                <a:pos x="csX17" y="csY17"/>
+              </a:cxn>
+              <a:cxn ang="0">
+                <a:pos x="csX18" y="csY18"/>
+              </a:cxn>
+              <a:cxn ang="0">
+                <a:pos x="csX19" y="csY19"/>
+              </a:cxn>
+              <a:cxn ang="0">
+                <a:pos x="csX20" y="csY20"/>
+              </a:cxn>
+              <a:cxn ang="0">
+                <a:pos x="csX21" y="csY21"/>
+              </a:cxn>
+              <a:cxn ang="0">
+                <a:pos x="csX22" y="csY22"/>
+              </a:cxn>
+              <a:cxn ang="0">
+                <a:pos x="csX23" y="csY23"/>
+              </a:cxn>
+              <a:cxn ang="0">
+                <a:pos x="csX24" y="csY24"/>
+              </a:cxn>
+              <a:cxn ang="0">
+                <a:pos x="csX25" y="csY25"/>
+              </a:cxn>
+              <a:cxn ang="0">
+                <a:pos x="csX26" y="csY26"/>
+              </a:cxn>
+              <a:cxn ang="0">
+                <a:pos x="csX27" y="csY27"/>
+              </a:cxn>
+              <a:cxn ang="0">
+                <a:pos x="csX28" y="csY28"/>
+              </a:cxn>
+              <a:cxn ang="0">
+                <a:pos x="csX29" y="csY29"/>
+              </a:cxn>
+              <a:cxn ang="0">
+                <a:pos x="csX30" y="csY30"/>
+              </a:cxn>
+              <a:cxn ang="0">
+                <a:pos x="csX31" y="csY31"/>
+              </a:cxn>
+              <a:cxn ang="0">
+                <a:pos x="csX32" y="csY32"/>
+              </a:cxn>
+              <a:cxn ang="0">
+                <a:pos x="csX33" y="csY33"/>
+              </a:cxn>
+              <a:cxn ang="0">
+                <a:pos x="csX34" y="csY34"/>
+              </a:cxn>
+              <a:cxn ang="0">
+                <a:pos x="csX35" y="csY35"/>
+              </a:cxn>
+              <a:cxn ang="0">
+                <a:pos x="csX36" y="csY36"/>
+              </a:cxn>
+              <a:cxn ang="0">
+                <a:pos x="csX37" y="csY37"/>
+              </a:cxn>
+              <a:cxn ang="0">
+                <a:pos x="csX38" y="csY38"/>
+              </a:cxn>
+              <a:cxn ang="0">
+                <a:pos x="csX39" y="csY39"/>
+              </a:cxn>
+              <a:cxn ang="0">
+                <a:pos x="csX40" y="csY40"/>
+              </a:cxn>
+              <a:cxn ang="0">
+                <a:pos x="csX41" y="csY41"/>
+              </a:cxn>
+              <a:cxn ang="0">
+                <a:pos x="csX42" y="csY42"/>
+              </a:cxn>
+              <a:cxn ang="0">
+                <a:pos x="csX43" y="csY43"/>
+              </a:cxn>
+              <a:cxn ang="0">
+                <a:pos x="csX44" y="csY44"/>
+              </a:cxn>
+              <a:cxn ang="0">
+                <a:pos x="csX45" y="csY45"/>
+              </a:cxn>
+              <a:cxn ang="0">
+                <a:pos x="csX46" y="csY46"/>
+              </a:cxn>
+              <a:cxn ang="0">
+                <a:pos x="csX47" y="csY47"/>
+              </a:cxn>
+              <a:cxn ang="0">
+                <a:pos x="csX48" y="csY48"/>
+              </a:cxn>
+              <a:cxn ang="0">
+                <a:pos x="csX49" y="csY49"/>
+              </a:cxn>
+              <a:cxn ang="0">
+                <a:pos x="csX50" y="csY50"/>
               </a:cxn>
             </a:cxnLst>
             <a:rect l="l" t="t" r="r" b="b"/>
@@ -6494,93 +6494,93 @@
           <a:custGeom>
             <a:avLst/>
             <a:gdLst>
-              <a:gd name="connsiteX0" fmla="*/ 0 w 4243589"/>
-              <a:gd name="connsiteY0" fmla="*/ 0 h 18288"/>
-              <a:gd name="connsiteX1" fmla="*/ 563791 w 4243589"/>
-              <a:gd name="connsiteY1" fmla="*/ 0 h 18288"/>
-              <a:gd name="connsiteX2" fmla="*/ 1042710 w 4243589"/>
-              <a:gd name="connsiteY2" fmla="*/ 0 h 18288"/>
-              <a:gd name="connsiteX3" fmla="*/ 1564066 w 4243589"/>
-              <a:gd name="connsiteY3" fmla="*/ 0 h 18288"/>
-              <a:gd name="connsiteX4" fmla="*/ 2212729 w 4243589"/>
-              <a:gd name="connsiteY4" fmla="*/ 0 h 18288"/>
-              <a:gd name="connsiteX5" fmla="*/ 2776520 w 4243589"/>
-              <a:gd name="connsiteY5" fmla="*/ 0 h 18288"/>
-              <a:gd name="connsiteX6" fmla="*/ 3297875 w 4243589"/>
-              <a:gd name="connsiteY6" fmla="*/ 0 h 18288"/>
-              <a:gd name="connsiteX7" fmla="*/ 4243589 w 4243589"/>
-              <a:gd name="connsiteY7" fmla="*/ 0 h 18288"/>
-              <a:gd name="connsiteX8" fmla="*/ 4243589 w 4243589"/>
-              <a:gd name="connsiteY8" fmla="*/ 18288 h 18288"/>
-              <a:gd name="connsiteX9" fmla="*/ 3637362 w 4243589"/>
-              <a:gd name="connsiteY9" fmla="*/ 18288 h 18288"/>
-              <a:gd name="connsiteX10" fmla="*/ 3116007 w 4243589"/>
-              <a:gd name="connsiteY10" fmla="*/ 18288 h 18288"/>
-              <a:gd name="connsiteX11" fmla="*/ 2424908 w 4243589"/>
-              <a:gd name="connsiteY11" fmla="*/ 18288 h 18288"/>
-              <a:gd name="connsiteX12" fmla="*/ 1861117 w 4243589"/>
-              <a:gd name="connsiteY12" fmla="*/ 18288 h 18288"/>
-              <a:gd name="connsiteX13" fmla="*/ 1382198 w 4243589"/>
-              <a:gd name="connsiteY13" fmla="*/ 18288 h 18288"/>
-              <a:gd name="connsiteX14" fmla="*/ 733535 w 4243589"/>
-              <a:gd name="connsiteY14" fmla="*/ 18288 h 18288"/>
-              <a:gd name="connsiteX15" fmla="*/ 0 w 4243589"/>
-              <a:gd name="connsiteY15" fmla="*/ 18288 h 18288"/>
-              <a:gd name="connsiteX16" fmla="*/ 0 w 4243589"/>
-              <a:gd name="connsiteY16" fmla="*/ 0 h 18288"/>
+              <a:gd name="csX0" fmla="*/ 0 w 4243589"/>
+              <a:gd name="csY0" fmla="*/ 0 h 18288"/>
+              <a:gd name="csX1" fmla="*/ 563791 w 4243589"/>
+              <a:gd name="csY1" fmla="*/ 0 h 18288"/>
+              <a:gd name="csX2" fmla="*/ 1042710 w 4243589"/>
+              <a:gd name="csY2" fmla="*/ 0 h 18288"/>
+              <a:gd name="csX3" fmla="*/ 1564066 w 4243589"/>
+              <a:gd name="csY3" fmla="*/ 0 h 18288"/>
+              <a:gd name="csX4" fmla="*/ 2212729 w 4243589"/>
+              <a:gd name="csY4" fmla="*/ 0 h 18288"/>
+              <a:gd name="csX5" fmla="*/ 2776520 w 4243589"/>
+              <a:gd name="csY5" fmla="*/ 0 h 18288"/>
+              <a:gd name="csX6" fmla="*/ 3297875 w 4243589"/>
+              <a:gd name="csY6" fmla="*/ 0 h 18288"/>
+              <a:gd name="csX7" fmla="*/ 4243589 w 4243589"/>
+              <a:gd name="csY7" fmla="*/ 0 h 18288"/>
+              <a:gd name="csX8" fmla="*/ 4243589 w 4243589"/>
+              <a:gd name="csY8" fmla="*/ 18288 h 18288"/>
+              <a:gd name="csX9" fmla="*/ 3637362 w 4243589"/>
+              <a:gd name="csY9" fmla="*/ 18288 h 18288"/>
+              <a:gd name="csX10" fmla="*/ 3116007 w 4243589"/>
+              <a:gd name="csY10" fmla="*/ 18288 h 18288"/>
+              <a:gd name="csX11" fmla="*/ 2424908 w 4243589"/>
+              <a:gd name="csY11" fmla="*/ 18288 h 18288"/>
+              <a:gd name="csX12" fmla="*/ 1861117 w 4243589"/>
+              <a:gd name="csY12" fmla="*/ 18288 h 18288"/>
+              <a:gd name="csX13" fmla="*/ 1382198 w 4243589"/>
+              <a:gd name="csY13" fmla="*/ 18288 h 18288"/>
+              <a:gd name="csX14" fmla="*/ 733535 w 4243589"/>
+              <a:gd name="csY14" fmla="*/ 18288 h 18288"/>
+              <a:gd name="csX15" fmla="*/ 0 w 4243589"/>
+              <a:gd name="csY15" fmla="*/ 18288 h 18288"/>
+              <a:gd name="csX16" fmla="*/ 0 w 4243589"/>
+              <a:gd name="csY16" fmla="*/ 0 h 18288"/>
             </a:gdLst>
             <a:ahLst/>
             <a:cxnLst>
               <a:cxn ang="0">
-                <a:pos x="connsiteX0" y="connsiteY0"/>
-              </a:cxn>
-              <a:cxn ang="0">
-                <a:pos x="connsiteX1" y="connsiteY1"/>
-              </a:cxn>
-              <a:cxn ang="0">
-                <a:pos x="connsiteX2" y="connsiteY2"/>
-              </a:cxn>
-              <a:cxn ang="0">
-                <a:pos x="connsiteX3" y="connsiteY3"/>
-              </a:cxn>
-              <a:cxn ang="0">
-                <a:pos x="connsiteX4" y="connsiteY4"/>
-              </a:cxn>
-              <a:cxn ang="0">
-                <a:pos x="connsiteX5" y="connsiteY5"/>
-              </a:cxn>
-              <a:cxn ang="0">
-                <a:pos x="connsiteX6" y="connsiteY6"/>
-              </a:cxn>
-              <a:cxn ang="0">
-                <a:pos x="connsiteX7" y="connsiteY7"/>
-              </a:cxn>
-              <a:cxn ang="0">
-                <a:pos x="connsiteX8" y="connsiteY8"/>
-              </a:cxn>
-              <a:cxn ang="0">
-                <a:pos x="connsiteX9" y="connsiteY9"/>
-              </a:cxn>
-              <a:cxn ang="0">
-                <a:pos x="connsiteX10" y="connsiteY10"/>
-              </a:cxn>
-              <a:cxn ang="0">
-                <a:pos x="connsiteX11" y="connsiteY11"/>
-              </a:cxn>
-              <a:cxn ang="0">
-                <a:pos x="connsiteX12" y="connsiteY12"/>
-              </a:cxn>
-              <a:cxn ang="0">
-                <a:pos x="connsiteX13" y="connsiteY13"/>
-              </a:cxn>
-              <a:cxn ang="0">
-                <a:pos x="connsiteX14" y="connsiteY14"/>
-              </a:cxn>
-              <a:cxn ang="0">
-                <a:pos x="connsiteX15" y="connsiteY15"/>
-              </a:cxn>
-              <a:cxn ang="0">
-                <a:pos x="connsiteX16" y="connsiteY16"/>
+                <a:pos x="csX0" y="csY0"/>
+              </a:cxn>
+              <a:cxn ang="0">
+                <a:pos x="csX1" y="csY1"/>
+              </a:cxn>
+              <a:cxn ang="0">
+                <a:pos x="csX2" y="csY2"/>
+              </a:cxn>
+              <a:cxn ang="0">
+                <a:pos x="csX3" y="csY3"/>
+              </a:cxn>
+              <a:cxn ang="0">
+                <a:pos x="csX4" y="csY4"/>
+              </a:cxn>
+              <a:cxn ang="0">
+                <a:pos x="csX5" y="csY5"/>
+              </a:cxn>
+              <a:cxn ang="0">
+                <a:pos x="csX6" y="csY6"/>
+              </a:cxn>
+              <a:cxn ang="0">
+                <a:pos x="csX7" y="csY7"/>
+              </a:cxn>
+              <a:cxn ang="0">
+                <a:pos x="csX8" y="csY8"/>
+              </a:cxn>
+              <a:cxn ang="0">
+                <a:pos x="csX9" y="csY9"/>
+              </a:cxn>
+              <a:cxn ang="0">
+                <a:pos x="csX10" y="csY10"/>
+              </a:cxn>
+              <a:cxn ang="0">
+                <a:pos x="csX11" y="csY11"/>
+              </a:cxn>
+              <a:cxn ang="0">
+                <a:pos x="csX12" y="csY12"/>
+              </a:cxn>
+              <a:cxn ang="0">
+                <a:pos x="csX13" y="csY13"/>
+              </a:cxn>
+              <a:cxn ang="0">
+                <a:pos x="csX14" y="csY14"/>
+              </a:cxn>
+              <a:cxn ang="0">
+                <a:pos x="csX15" y="csY15"/>
+              </a:cxn>
+              <a:cxn ang="0">
+                <a:pos x="csX16" y="csY16"/>
               </a:cxn>
             </a:cxnLst>
             <a:rect l="l" t="t" r="r" b="b"/>
@@ -6942,11 +6942,7 @@
           <a:bodyPr/>
           <a:lstStyle/>
           <a:p>
-            <a:fld id="{862B6F80-F88C-4C14-92D9-08910A7F91DD}" type="datetime3">
-              <a:rPr lang="en-GB" smtClean="0"/>
-              <a:t>1 June, 2023</a:t>
-            </a:fld>
-            <a:endParaRPr lang="en-GB"/>
+            <a:endParaRPr lang="en-GB" dirty="0"/>
           </a:p>
         </p:txBody>
       </p:sp>
@@ -7115,188 +7111,188 @@
           <a:custGeom>
             <a:avLst/>
             <a:gdLst>
-              <a:gd name="connsiteX0" fmla="*/ 0 w 10853928"/>
-              <a:gd name="connsiteY0" fmla="*/ 0 h 18288"/>
-              <a:gd name="connsiteX1" fmla="*/ 461292 w 10853928"/>
-              <a:gd name="connsiteY1" fmla="*/ 0 h 18288"/>
-              <a:gd name="connsiteX2" fmla="*/ 1139662 w 10853928"/>
-              <a:gd name="connsiteY2" fmla="*/ 0 h 18288"/>
-              <a:gd name="connsiteX3" fmla="*/ 1926572 w 10853928"/>
-              <a:gd name="connsiteY3" fmla="*/ 0 h 18288"/>
-              <a:gd name="connsiteX4" fmla="*/ 2279325 w 10853928"/>
-              <a:gd name="connsiteY4" fmla="*/ 0 h 18288"/>
-              <a:gd name="connsiteX5" fmla="*/ 2632078 w 10853928"/>
-              <a:gd name="connsiteY5" fmla="*/ 0 h 18288"/>
-              <a:gd name="connsiteX6" fmla="*/ 3527527 w 10853928"/>
-              <a:gd name="connsiteY6" fmla="*/ 0 h 18288"/>
-              <a:gd name="connsiteX7" fmla="*/ 4205897 w 10853928"/>
-              <a:gd name="connsiteY7" fmla="*/ 0 h 18288"/>
-              <a:gd name="connsiteX8" fmla="*/ 4558650 w 10853928"/>
-              <a:gd name="connsiteY8" fmla="*/ 0 h 18288"/>
-              <a:gd name="connsiteX9" fmla="*/ 5237020 w 10853928"/>
-              <a:gd name="connsiteY9" fmla="*/ 0 h 18288"/>
-              <a:gd name="connsiteX10" fmla="*/ 6132469 w 10853928"/>
-              <a:gd name="connsiteY10" fmla="*/ 0 h 18288"/>
-              <a:gd name="connsiteX11" fmla="*/ 6702301 w 10853928"/>
-              <a:gd name="connsiteY11" fmla="*/ 0 h 18288"/>
-              <a:gd name="connsiteX12" fmla="*/ 7272132 w 10853928"/>
-              <a:gd name="connsiteY12" fmla="*/ 0 h 18288"/>
-              <a:gd name="connsiteX13" fmla="*/ 7950502 w 10853928"/>
-              <a:gd name="connsiteY13" fmla="*/ 0 h 18288"/>
-              <a:gd name="connsiteX14" fmla="*/ 8737412 w 10853928"/>
-              <a:gd name="connsiteY14" fmla="*/ 0 h 18288"/>
-              <a:gd name="connsiteX15" fmla="*/ 9524322 w 10853928"/>
-              <a:gd name="connsiteY15" fmla="*/ 0 h 18288"/>
-              <a:gd name="connsiteX16" fmla="*/ 10853928 w 10853928"/>
-              <a:gd name="connsiteY16" fmla="*/ 0 h 18288"/>
-              <a:gd name="connsiteX17" fmla="*/ 10853928 w 10853928"/>
-              <a:gd name="connsiteY17" fmla="*/ 18288 h 18288"/>
-              <a:gd name="connsiteX18" fmla="*/ 10392636 w 10853928"/>
-              <a:gd name="connsiteY18" fmla="*/ 18288 h 18288"/>
-              <a:gd name="connsiteX19" fmla="*/ 9497187 w 10853928"/>
-              <a:gd name="connsiteY19" fmla="*/ 18288 h 18288"/>
-              <a:gd name="connsiteX20" fmla="*/ 8818817 w 10853928"/>
-              <a:gd name="connsiteY20" fmla="*/ 18288 h 18288"/>
-              <a:gd name="connsiteX21" fmla="*/ 8466064 w 10853928"/>
-              <a:gd name="connsiteY21" fmla="*/ 18288 h 18288"/>
-              <a:gd name="connsiteX22" fmla="*/ 7787693 w 10853928"/>
-              <a:gd name="connsiteY22" fmla="*/ 18288 h 18288"/>
-              <a:gd name="connsiteX23" fmla="*/ 7217862 w 10853928"/>
-              <a:gd name="connsiteY23" fmla="*/ 18288 h 18288"/>
-              <a:gd name="connsiteX24" fmla="*/ 6648031 w 10853928"/>
-              <a:gd name="connsiteY24" fmla="*/ 18288 h 18288"/>
-              <a:gd name="connsiteX25" fmla="*/ 6078200 w 10853928"/>
-              <a:gd name="connsiteY25" fmla="*/ 18288 h 18288"/>
-              <a:gd name="connsiteX26" fmla="*/ 5508368 w 10853928"/>
-              <a:gd name="connsiteY26" fmla="*/ 18288 h 18288"/>
-              <a:gd name="connsiteX27" fmla="*/ 4721459 w 10853928"/>
-              <a:gd name="connsiteY27" fmla="*/ 18288 h 18288"/>
-              <a:gd name="connsiteX28" fmla="*/ 4043088 w 10853928"/>
-              <a:gd name="connsiteY28" fmla="*/ 18288 h 18288"/>
-              <a:gd name="connsiteX29" fmla="*/ 3690336 w 10853928"/>
-              <a:gd name="connsiteY29" fmla="*/ 18288 h 18288"/>
-              <a:gd name="connsiteX30" fmla="*/ 3120504 w 10853928"/>
-              <a:gd name="connsiteY30" fmla="*/ 18288 h 18288"/>
-              <a:gd name="connsiteX31" fmla="*/ 2333595 w 10853928"/>
-              <a:gd name="connsiteY31" fmla="*/ 18288 h 18288"/>
-              <a:gd name="connsiteX32" fmla="*/ 1872303 w 10853928"/>
-              <a:gd name="connsiteY32" fmla="*/ 18288 h 18288"/>
-              <a:gd name="connsiteX33" fmla="*/ 976854 w 10853928"/>
-              <a:gd name="connsiteY33" fmla="*/ 18288 h 18288"/>
-              <a:gd name="connsiteX34" fmla="*/ 0 w 10853928"/>
-              <a:gd name="connsiteY34" fmla="*/ 18288 h 18288"/>
-              <a:gd name="connsiteX35" fmla="*/ 0 w 10853928"/>
-              <a:gd name="connsiteY35" fmla="*/ 0 h 18288"/>
+              <a:gd name="csX0" fmla="*/ 0 w 10853928"/>
+              <a:gd name="csY0" fmla="*/ 0 h 18288"/>
+              <a:gd name="csX1" fmla="*/ 461292 w 10853928"/>
+              <a:gd name="csY1" fmla="*/ 0 h 18288"/>
+              <a:gd name="csX2" fmla="*/ 1139662 w 10853928"/>
+              <a:gd name="csY2" fmla="*/ 0 h 18288"/>
+              <a:gd name="csX3" fmla="*/ 1926572 w 10853928"/>
+              <a:gd name="csY3" fmla="*/ 0 h 18288"/>
+              <a:gd name="csX4" fmla="*/ 2279325 w 10853928"/>
+              <a:gd name="csY4" fmla="*/ 0 h 18288"/>
+              <a:gd name="csX5" fmla="*/ 2632078 w 10853928"/>
+              <a:gd name="csY5" fmla="*/ 0 h 18288"/>
+              <a:gd name="csX6" fmla="*/ 3527527 w 10853928"/>
+              <a:gd name="csY6" fmla="*/ 0 h 18288"/>
+              <a:gd name="csX7" fmla="*/ 4205897 w 10853928"/>
+              <a:gd name="csY7" fmla="*/ 0 h 18288"/>
+              <a:gd name="csX8" fmla="*/ 4558650 w 10853928"/>
+              <a:gd name="csY8" fmla="*/ 0 h 18288"/>
+              <a:gd name="csX9" fmla="*/ 5237020 w 10853928"/>
+              <a:gd name="csY9" fmla="*/ 0 h 18288"/>
+              <a:gd name="csX10" fmla="*/ 6132469 w 10853928"/>
+              <a:gd name="csY10" fmla="*/ 0 h 18288"/>
+              <a:gd name="csX11" fmla="*/ 6702301 w 10853928"/>
+              <a:gd name="csY11" fmla="*/ 0 h 18288"/>
+              <a:gd name="csX12" fmla="*/ 7272132 w 10853928"/>
+              <a:gd name="csY12" fmla="*/ 0 h 18288"/>
+              <a:gd name="csX13" fmla="*/ 7950502 w 10853928"/>
+              <a:gd name="csY13" fmla="*/ 0 h 18288"/>
+              <a:gd name="csX14" fmla="*/ 8737412 w 10853928"/>
+              <a:gd name="csY14" fmla="*/ 0 h 18288"/>
+              <a:gd name="csX15" fmla="*/ 9524322 w 10853928"/>
+              <a:gd name="csY15" fmla="*/ 0 h 18288"/>
+              <a:gd name="csX16" fmla="*/ 10853928 w 10853928"/>
+              <a:gd name="csY16" fmla="*/ 0 h 18288"/>
+              <a:gd name="csX17" fmla="*/ 10853928 w 10853928"/>
+              <a:gd name="csY17" fmla="*/ 18288 h 18288"/>
+              <a:gd name="csX18" fmla="*/ 10392636 w 10853928"/>
+              <a:gd name="csY18" fmla="*/ 18288 h 18288"/>
+              <a:gd name="csX19" fmla="*/ 9497187 w 10853928"/>
+              <a:gd name="csY19" fmla="*/ 18288 h 18288"/>
+              <a:gd name="csX20" fmla="*/ 8818817 w 10853928"/>
+              <a:gd name="csY20" fmla="*/ 18288 h 18288"/>
+              <a:gd name="csX21" fmla="*/ 8466064 w 10853928"/>
+              <a:gd name="csY21" fmla="*/ 18288 h 18288"/>
+              <a:gd name="csX22" fmla="*/ 7787693 w 10853928"/>
+              <a:gd name="csY22" fmla="*/ 18288 h 18288"/>
+              <a:gd name="csX23" fmla="*/ 7217862 w 10853928"/>
+              <a:gd name="csY23" fmla="*/ 18288 h 18288"/>
+              <a:gd name="csX24" fmla="*/ 6648031 w 10853928"/>
+              <a:gd name="csY24" fmla="*/ 18288 h 18288"/>
+              <a:gd name="csX25" fmla="*/ 6078200 w 10853928"/>
+              <a:gd name="csY25" fmla="*/ 18288 h 18288"/>
+              <a:gd name="csX26" fmla="*/ 5508368 w 10853928"/>
+              <a:gd name="csY26" fmla="*/ 18288 h 18288"/>
+              <a:gd name="csX27" fmla="*/ 4721459 w 10853928"/>
+              <a:gd name="csY27" fmla="*/ 18288 h 18288"/>
+              <a:gd name="csX28" fmla="*/ 4043088 w 10853928"/>
+              <a:gd name="csY28" fmla="*/ 18288 h 18288"/>
+              <a:gd name="csX29" fmla="*/ 3690336 w 10853928"/>
+              <a:gd name="csY29" fmla="*/ 18288 h 18288"/>
+              <a:gd name="csX30" fmla="*/ 3120504 w 10853928"/>
+              <a:gd name="csY30" fmla="*/ 18288 h 18288"/>
+              <a:gd name="csX31" fmla="*/ 2333595 w 10853928"/>
+              <a:gd name="csY31" fmla="*/ 18288 h 18288"/>
+              <a:gd name="csX32" fmla="*/ 1872303 w 10853928"/>
+              <a:gd name="csY32" fmla="*/ 18288 h 18288"/>
+              <a:gd name="csX33" fmla="*/ 976854 w 10853928"/>
+              <a:gd name="csY33" fmla="*/ 18288 h 18288"/>
+              <a:gd name="csX34" fmla="*/ 0 w 10853928"/>
+              <a:gd name="csY34" fmla="*/ 18288 h 18288"/>
+              <a:gd name="csX35" fmla="*/ 0 w 10853928"/>
+              <a:gd name="csY35" fmla="*/ 0 h 18288"/>
             </a:gdLst>
             <a:ahLst/>
             <a:cxnLst>
               <a:cxn ang="0">
-                <a:pos x="connsiteX0" y="connsiteY0"/>
-              </a:cxn>
-              <a:cxn ang="0">
-                <a:pos x="connsiteX1" y="connsiteY1"/>
-              </a:cxn>
-              <a:cxn ang="0">
-                <a:pos x="connsiteX2" y="connsiteY2"/>
-              </a:cxn>
-              <a:cxn ang="0">
-                <a:pos x="connsiteX3" y="connsiteY3"/>
-              </a:cxn>
-              <a:cxn ang="0">
-                <a:pos x="connsiteX4" y="connsiteY4"/>
-              </a:cxn>
-              <a:cxn ang="0">
-                <a:pos x="connsiteX5" y="connsiteY5"/>
-              </a:cxn>
-              <a:cxn ang="0">
-                <a:pos x="connsiteX6" y="connsiteY6"/>
-              </a:cxn>
-              <a:cxn ang="0">
-                <a:pos x="connsiteX7" y="connsiteY7"/>
-              </a:cxn>
-              <a:cxn ang="0">
-                <a:pos x="connsiteX8" y="connsiteY8"/>
-              </a:cxn>
-              <a:cxn ang="0">
-                <a:pos x="connsiteX9" y="connsiteY9"/>
-              </a:cxn>
-              <a:cxn ang="0">
-                <a:pos x="connsiteX10" y="connsiteY10"/>
-              </a:cxn>
-              <a:cxn ang="0">
-                <a:pos x="connsiteX11" y="connsiteY11"/>
-              </a:cxn>
-              <a:cxn ang="0">
-                <a:pos x="connsiteX12" y="connsiteY12"/>
-              </a:cxn>
-              <a:cxn ang="0">
-                <a:pos x="connsiteX13" y="connsiteY13"/>
-              </a:cxn>
-              <a:cxn ang="0">
-                <a:pos x="connsiteX14" y="connsiteY14"/>
-              </a:cxn>
-              <a:cxn ang="0">
-                <a:pos x="connsiteX15" y="connsiteY15"/>
-              </a:cxn>
-              <a:cxn ang="0">
-                <a:pos x="connsiteX16" y="connsiteY16"/>
-              </a:cxn>
-              <a:cxn ang="0">
-                <a:pos x="connsiteX17" y="connsiteY17"/>
-              </a:cxn>
-              <a:cxn ang="0">
-                <a:pos x="connsiteX18" y="connsiteY18"/>
-              </a:cxn>
-              <a:cxn ang="0">
-                <a:pos x="connsiteX19" y="connsiteY19"/>
-              </a:cxn>
-              <a:cxn ang="0">
-                <a:pos x="connsiteX20" y="connsiteY20"/>
-              </a:cxn>
-              <a:cxn ang="0">
-                <a:pos x="connsiteX21" y="connsiteY21"/>
-              </a:cxn>
-              <a:cxn ang="0">
-                <a:pos x="connsiteX22" y="connsiteY22"/>
-              </a:cxn>
-              <a:cxn ang="0">
-                <a:pos x="connsiteX23" y="connsiteY23"/>
-              </a:cxn>
-              <a:cxn ang="0">
-                <a:pos x="connsiteX24" y="connsiteY24"/>
-              </a:cxn>
-              <a:cxn ang="0">
-                <a:pos x="connsiteX25" y="connsiteY25"/>
-              </a:cxn>
-              <a:cxn ang="0">
-                <a:pos x="connsiteX26" y="connsiteY26"/>
-              </a:cxn>
-              <a:cxn ang="0">
-                <a:pos x="connsiteX27" y="connsiteY27"/>
-              </a:cxn>
-              <a:cxn ang="0">
-                <a:pos x="connsiteX28" y="connsiteY28"/>
-              </a:cxn>
-              <a:cxn ang="0">
-                <a:pos x="connsiteX29" y="connsiteY29"/>
-              </a:cxn>
-              <a:cxn ang="0">
-                <a:pos x="connsiteX30" y="connsiteY30"/>
-              </a:cxn>
-              <a:cxn ang="0">
-                <a:pos x="connsiteX31" y="connsiteY31"/>
-              </a:cxn>
-              <a:cxn ang="0">
-                <a:pos x="connsiteX32" y="connsiteY32"/>
-              </a:cxn>
-              <a:cxn ang="0">
-                <a:pos x="connsiteX33" y="connsiteY33"/>
-              </a:cxn>
-              <a:cxn ang="0">
-                <a:pos x="connsiteX34" y="connsiteY34"/>
-              </a:cxn>
-              <a:cxn ang="0">
-                <a:pos x="connsiteX35" y="connsiteY35"/>
+                <a:pos x="csX0" y="csY0"/>
+              </a:cxn>
+              <a:cxn ang="0">
+                <a:pos x="csX1" y="csY1"/>
+              </a:cxn>
+              <a:cxn ang="0">
+                <a:pos x="csX2" y="csY2"/>
+              </a:cxn>
+              <a:cxn ang="0">
+                <a:pos x="csX3" y="csY3"/>
+              </a:cxn>
+              <a:cxn ang="0">
+                <a:pos x="csX4" y="csY4"/>
+              </a:cxn>
+              <a:cxn ang="0">
+                <a:pos x="csX5" y="csY5"/>
+              </a:cxn>
+              <a:cxn ang="0">
+                <a:pos x="csX6" y="csY6"/>
+              </a:cxn>
+              <a:cxn ang="0">
+                <a:pos x="csX7" y="csY7"/>
+              </a:cxn>
+              <a:cxn ang="0">
+                <a:pos x="csX8" y="csY8"/>
+              </a:cxn>
+              <a:cxn ang="0">
+                <a:pos x="csX9" y="csY9"/>
+              </a:cxn>
+              <a:cxn ang="0">
+                <a:pos x="csX10" y="csY10"/>
+              </a:cxn>
+              <a:cxn ang="0">
+                <a:pos x="csX11" y="csY11"/>
+              </a:cxn>
+              <a:cxn ang="0">
+                <a:pos x="csX12" y="csY12"/>
+              </a:cxn>
+              <a:cxn ang="0">
+                <a:pos x="csX13" y="csY13"/>
+              </a:cxn>
+              <a:cxn ang="0">
+                <a:pos x="csX14" y="csY14"/>
+              </a:cxn>
+              <a:cxn ang="0">
+                <a:pos x="csX15" y="csY15"/>
+              </a:cxn>
+              <a:cxn ang="0">
+                <a:pos x="csX16" y="csY16"/>
+              </a:cxn>
+              <a:cxn ang="0">
+                <a:pos x="csX17" y="csY17"/>
+              </a:cxn>
+              <a:cxn ang="0">
+                <a:pos x="csX18" y="csY18"/>
+              </a:cxn>
+              <a:cxn ang="0">
+                <a:pos x="csX19" y="csY19"/>
+              </a:cxn>
+              <a:cxn ang="0">
+                <a:pos x="csX20" y="csY20"/>
+              </a:cxn>
+              <a:cxn ang="0">
+                <a:pos x="csX21" y="csY21"/>
+              </a:cxn>
+              <a:cxn ang="0">
+                <a:pos x="csX22" y="csY22"/>
+              </a:cxn>
+              <a:cxn ang="0">
+                <a:pos x="csX23" y="csY23"/>
+              </a:cxn>
+              <a:cxn ang="0">
+                <a:pos x="csX24" y="csY24"/>
+              </a:cxn>
+              <a:cxn ang="0">
+                <a:pos x="csX25" y="csY25"/>
+              </a:cxn>
+              <a:cxn ang="0">
+                <a:pos x="csX26" y="csY26"/>
+              </a:cxn>
+              <a:cxn ang="0">
+                <a:pos x="csX27" y="csY27"/>
+              </a:cxn>
+              <a:cxn ang="0">
+                <a:pos x="csX28" y="csY28"/>
+              </a:cxn>
+              <a:cxn ang="0">
+                <a:pos x="csX29" y="csY29"/>
+              </a:cxn>
+              <a:cxn ang="0">
+                <a:pos x="csX30" y="csY30"/>
+              </a:cxn>
+              <a:cxn ang="0">
+                <a:pos x="csX31" y="csY31"/>
+              </a:cxn>
+              <a:cxn ang="0">
+                <a:pos x="csX32" y="csY32"/>
+              </a:cxn>
+              <a:cxn ang="0">
+                <a:pos x="csX33" y="csY33"/>
+              </a:cxn>
+              <a:cxn ang="0">
+                <a:pos x="csX34" y="csY34"/>
+              </a:cxn>
+              <a:cxn ang="0">
+                <a:pos x="csX35" y="csY35"/>
               </a:cxn>
             </a:cxnLst>
             <a:rect l="l" t="t" r="r" b="b"/>
@@ -8034,68 +8030,68 @@
           <a:custGeom>
             <a:avLst/>
             <a:gdLst>
-              <a:gd name="connsiteX0" fmla="*/ 0 w 3255095"/>
-              <a:gd name="connsiteY0" fmla="*/ 0 h 18288"/>
-              <a:gd name="connsiteX1" fmla="*/ 618468 w 3255095"/>
-              <a:gd name="connsiteY1" fmla="*/ 0 h 18288"/>
-              <a:gd name="connsiteX2" fmla="*/ 1269487 w 3255095"/>
-              <a:gd name="connsiteY2" fmla="*/ 0 h 18288"/>
-              <a:gd name="connsiteX3" fmla="*/ 1953057 w 3255095"/>
-              <a:gd name="connsiteY3" fmla="*/ 0 h 18288"/>
-              <a:gd name="connsiteX4" fmla="*/ 2636627 w 3255095"/>
-              <a:gd name="connsiteY4" fmla="*/ 0 h 18288"/>
-              <a:gd name="connsiteX5" fmla="*/ 3255095 w 3255095"/>
-              <a:gd name="connsiteY5" fmla="*/ 0 h 18288"/>
-              <a:gd name="connsiteX6" fmla="*/ 3255095 w 3255095"/>
-              <a:gd name="connsiteY6" fmla="*/ 18288 h 18288"/>
-              <a:gd name="connsiteX7" fmla="*/ 2538974 w 3255095"/>
-              <a:gd name="connsiteY7" fmla="*/ 18288 h 18288"/>
-              <a:gd name="connsiteX8" fmla="*/ 1822853 w 3255095"/>
-              <a:gd name="connsiteY8" fmla="*/ 18288 h 18288"/>
-              <a:gd name="connsiteX9" fmla="*/ 1171834 w 3255095"/>
-              <a:gd name="connsiteY9" fmla="*/ 18288 h 18288"/>
-              <a:gd name="connsiteX10" fmla="*/ 0 w 3255095"/>
-              <a:gd name="connsiteY10" fmla="*/ 18288 h 18288"/>
-              <a:gd name="connsiteX11" fmla="*/ 0 w 3255095"/>
-              <a:gd name="connsiteY11" fmla="*/ 0 h 18288"/>
+              <a:gd name="csX0" fmla="*/ 0 w 3255095"/>
+              <a:gd name="csY0" fmla="*/ 0 h 18288"/>
+              <a:gd name="csX1" fmla="*/ 618468 w 3255095"/>
+              <a:gd name="csY1" fmla="*/ 0 h 18288"/>
+              <a:gd name="csX2" fmla="*/ 1269487 w 3255095"/>
+              <a:gd name="csY2" fmla="*/ 0 h 18288"/>
+              <a:gd name="csX3" fmla="*/ 1953057 w 3255095"/>
+              <a:gd name="csY3" fmla="*/ 0 h 18288"/>
+              <a:gd name="csX4" fmla="*/ 2636627 w 3255095"/>
+              <a:gd name="csY4" fmla="*/ 0 h 18288"/>
+              <a:gd name="csX5" fmla="*/ 3255095 w 3255095"/>
+              <a:gd name="csY5" fmla="*/ 0 h 18288"/>
+              <a:gd name="csX6" fmla="*/ 3255095 w 3255095"/>
+              <a:gd name="csY6" fmla="*/ 18288 h 18288"/>
+              <a:gd name="csX7" fmla="*/ 2538974 w 3255095"/>
+              <a:gd name="csY7" fmla="*/ 18288 h 18288"/>
+              <a:gd name="csX8" fmla="*/ 1822853 w 3255095"/>
+              <a:gd name="csY8" fmla="*/ 18288 h 18288"/>
+              <a:gd name="csX9" fmla="*/ 1171834 w 3255095"/>
+              <a:gd name="csY9" fmla="*/ 18288 h 18288"/>
+              <a:gd name="csX10" fmla="*/ 0 w 3255095"/>
+              <a:gd name="csY10" fmla="*/ 18288 h 18288"/>
+              <a:gd name="csX11" fmla="*/ 0 w 3255095"/>
+              <a:gd name="csY11" fmla="*/ 0 h 18288"/>
             </a:gdLst>
             <a:ahLst/>
             <a:cxnLst>
               <a:cxn ang="0">
-                <a:pos x="connsiteX0" y="connsiteY0"/>
-              </a:cxn>
-              <a:cxn ang="0">
-                <a:pos x="connsiteX1" y="connsiteY1"/>
-              </a:cxn>
-              <a:cxn ang="0">
-                <a:pos x="connsiteX2" y="connsiteY2"/>
-              </a:cxn>
-              <a:cxn ang="0">
-                <a:pos x="connsiteX3" y="connsiteY3"/>
-              </a:cxn>
-              <a:cxn ang="0">
-                <a:pos x="connsiteX4" y="connsiteY4"/>
-              </a:cxn>
-              <a:cxn ang="0">
-                <a:pos x="connsiteX5" y="connsiteY5"/>
-              </a:cxn>
-              <a:cxn ang="0">
-                <a:pos x="connsiteX6" y="connsiteY6"/>
-              </a:cxn>
-              <a:cxn ang="0">
-                <a:pos x="connsiteX7" y="connsiteY7"/>
-              </a:cxn>
-              <a:cxn ang="0">
-                <a:pos x="connsiteX8" y="connsiteY8"/>
-              </a:cxn>
-              <a:cxn ang="0">
-                <a:pos x="connsiteX9" y="connsiteY9"/>
-              </a:cxn>
-              <a:cxn ang="0">
-                <a:pos x="connsiteX10" y="connsiteY10"/>
-              </a:cxn>
-              <a:cxn ang="0">
-                <a:pos x="connsiteX11" y="connsiteY11"/>
+                <a:pos x="csX0" y="csY0"/>
+              </a:cxn>
+              <a:cxn ang="0">
+                <a:pos x="csX1" y="csY1"/>
+              </a:cxn>
+              <a:cxn ang="0">
+                <a:pos x="csX2" y="csY2"/>
+              </a:cxn>
+              <a:cxn ang="0">
+                <a:pos x="csX3" y="csY3"/>
+              </a:cxn>
+              <a:cxn ang="0">
+                <a:pos x="csX4" y="csY4"/>
+              </a:cxn>
+              <a:cxn ang="0">
+                <a:pos x="csX5" y="csY5"/>
+              </a:cxn>
+              <a:cxn ang="0">
+                <a:pos x="csX6" y="csY6"/>
+              </a:cxn>
+              <a:cxn ang="0">
+                <a:pos x="csX7" y="csY7"/>
+              </a:cxn>
+              <a:cxn ang="0">
+                <a:pos x="csX8" y="csY8"/>
+              </a:cxn>
+              <a:cxn ang="0">
+                <a:pos x="csX9" y="csY9"/>
+              </a:cxn>
+              <a:cxn ang="0">
+                <a:pos x="csX10" y="csY10"/>
+              </a:cxn>
+              <a:cxn ang="0">
+                <a:pos x="csX11" y="csY11"/>
               </a:cxn>
             </a:cxnLst>
             <a:rect l="l" t="t" r="r" b="b"/>
@@ -9663,53 +9659,53 @@
           <a:custGeom>
             <a:avLst/>
             <a:gdLst>
-              <a:gd name="connsiteX0" fmla="*/ 0 w 1554480"/>
-              <a:gd name="connsiteY0" fmla="*/ 0 h 18288"/>
-              <a:gd name="connsiteX1" fmla="*/ 549250 w 1554480"/>
-              <a:gd name="connsiteY1" fmla="*/ 0 h 18288"/>
-              <a:gd name="connsiteX2" fmla="*/ 1082954 w 1554480"/>
-              <a:gd name="connsiteY2" fmla="*/ 0 h 18288"/>
-              <a:gd name="connsiteX3" fmla="*/ 1554480 w 1554480"/>
-              <a:gd name="connsiteY3" fmla="*/ 0 h 18288"/>
-              <a:gd name="connsiteX4" fmla="*/ 1554480 w 1554480"/>
-              <a:gd name="connsiteY4" fmla="*/ 18288 h 18288"/>
-              <a:gd name="connsiteX5" fmla="*/ 1067410 w 1554480"/>
-              <a:gd name="connsiteY5" fmla="*/ 18288 h 18288"/>
-              <a:gd name="connsiteX6" fmla="*/ 549250 w 1554480"/>
-              <a:gd name="connsiteY6" fmla="*/ 18288 h 18288"/>
-              <a:gd name="connsiteX7" fmla="*/ 0 w 1554480"/>
-              <a:gd name="connsiteY7" fmla="*/ 18288 h 18288"/>
-              <a:gd name="connsiteX8" fmla="*/ 0 w 1554480"/>
-              <a:gd name="connsiteY8" fmla="*/ 0 h 18288"/>
+              <a:gd name="csX0" fmla="*/ 0 w 1554480"/>
+              <a:gd name="csY0" fmla="*/ 0 h 18288"/>
+              <a:gd name="csX1" fmla="*/ 549250 w 1554480"/>
+              <a:gd name="csY1" fmla="*/ 0 h 18288"/>
+              <a:gd name="csX2" fmla="*/ 1082954 w 1554480"/>
+              <a:gd name="csY2" fmla="*/ 0 h 18288"/>
+              <a:gd name="csX3" fmla="*/ 1554480 w 1554480"/>
+              <a:gd name="csY3" fmla="*/ 0 h 18288"/>
+              <a:gd name="csX4" fmla="*/ 1554480 w 1554480"/>
+              <a:gd name="csY4" fmla="*/ 18288 h 18288"/>
+              <a:gd name="csX5" fmla="*/ 1067410 w 1554480"/>
+              <a:gd name="csY5" fmla="*/ 18288 h 18288"/>
+              <a:gd name="csX6" fmla="*/ 549250 w 1554480"/>
+              <a:gd name="csY6" fmla="*/ 18288 h 18288"/>
+              <a:gd name="csX7" fmla="*/ 0 w 1554480"/>
+              <a:gd name="csY7" fmla="*/ 18288 h 18288"/>
+              <a:gd name="csX8" fmla="*/ 0 w 1554480"/>
+              <a:gd name="csY8" fmla="*/ 0 h 18288"/>
             </a:gdLst>
             <a:ahLst/>
             <a:cxnLst>
               <a:cxn ang="0">
-                <a:pos x="connsiteX0" y="connsiteY0"/>
-              </a:cxn>
-              <a:cxn ang="0">
-                <a:pos x="connsiteX1" y="connsiteY1"/>
-              </a:cxn>
-              <a:cxn ang="0">
-                <a:pos x="connsiteX2" y="connsiteY2"/>
-              </a:cxn>
-              <a:cxn ang="0">
-                <a:pos x="connsiteX3" y="connsiteY3"/>
-              </a:cxn>
-              <a:cxn ang="0">
-                <a:pos x="connsiteX4" y="connsiteY4"/>
-              </a:cxn>
-              <a:cxn ang="0">
-                <a:pos x="connsiteX5" y="connsiteY5"/>
-              </a:cxn>
-              <a:cxn ang="0">
-                <a:pos x="connsiteX6" y="connsiteY6"/>
-              </a:cxn>
-              <a:cxn ang="0">
-                <a:pos x="connsiteX7" y="connsiteY7"/>
-              </a:cxn>
-              <a:cxn ang="0">
-                <a:pos x="connsiteX8" y="connsiteY8"/>
+                <a:pos x="csX0" y="csY0"/>
+              </a:cxn>
+              <a:cxn ang="0">
+                <a:pos x="csX1" y="csY1"/>
+              </a:cxn>
+              <a:cxn ang="0">
+                <a:pos x="csX2" y="csY2"/>
+              </a:cxn>
+              <a:cxn ang="0">
+                <a:pos x="csX3" y="csY3"/>
+              </a:cxn>
+              <a:cxn ang="0">
+                <a:pos x="csX4" y="csY4"/>
+              </a:cxn>
+              <a:cxn ang="0">
+                <a:pos x="csX5" y="csY5"/>
+              </a:cxn>
+              <a:cxn ang="0">
+                <a:pos x="csX6" y="csY6"/>
+              </a:cxn>
+              <a:cxn ang="0">
+                <a:pos x="csX7" y="csY7"/>
+              </a:cxn>
+              <a:cxn ang="0">
+                <a:pos x="csX8" y="csY8"/>
               </a:cxn>
             </a:cxnLst>
             <a:rect l="l" t="t" r="r" b="b"/>
@@ -11651,188 +11647,188 @@
           <a:custGeom>
             <a:avLst/>
             <a:gdLst>
-              <a:gd name="connsiteX0" fmla="*/ 0 w 10853928"/>
-              <a:gd name="connsiteY0" fmla="*/ 0 h 18288"/>
-              <a:gd name="connsiteX1" fmla="*/ 461292 w 10853928"/>
-              <a:gd name="connsiteY1" fmla="*/ 0 h 18288"/>
-              <a:gd name="connsiteX2" fmla="*/ 1139662 w 10853928"/>
-              <a:gd name="connsiteY2" fmla="*/ 0 h 18288"/>
-              <a:gd name="connsiteX3" fmla="*/ 1926572 w 10853928"/>
-              <a:gd name="connsiteY3" fmla="*/ 0 h 18288"/>
-              <a:gd name="connsiteX4" fmla="*/ 2279325 w 10853928"/>
-              <a:gd name="connsiteY4" fmla="*/ 0 h 18288"/>
-              <a:gd name="connsiteX5" fmla="*/ 2632078 w 10853928"/>
-              <a:gd name="connsiteY5" fmla="*/ 0 h 18288"/>
-              <a:gd name="connsiteX6" fmla="*/ 3527527 w 10853928"/>
-              <a:gd name="connsiteY6" fmla="*/ 0 h 18288"/>
-              <a:gd name="connsiteX7" fmla="*/ 4205897 w 10853928"/>
-              <a:gd name="connsiteY7" fmla="*/ 0 h 18288"/>
-              <a:gd name="connsiteX8" fmla="*/ 4558650 w 10853928"/>
-              <a:gd name="connsiteY8" fmla="*/ 0 h 18288"/>
-              <a:gd name="connsiteX9" fmla="*/ 5237020 w 10853928"/>
-              <a:gd name="connsiteY9" fmla="*/ 0 h 18288"/>
-              <a:gd name="connsiteX10" fmla="*/ 6132469 w 10853928"/>
-              <a:gd name="connsiteY10" fmla="*/ 0 h 18288"/>
-              <a:gd name="connsiteX11" fmla="*/ 6702301 w 10853928"/>
-              <a:gd name="connsiteY11" fmla="*/ 0 h 18288"/>
-              <a:gd name="connsiteX12" fmla="*/ 7272132 w 10853928"/>
-              <a:gd name="connsiteY12" fmla="*/ 0 h 18288"/>
-              <a:gd name="connsiteX13" fmla="*/ 7950502 w 10853928"/>
-              <a:gd name="connsiteY13" fmla="*/ 0 h 18288"/>
-              <a:gd name="connsiteX14" fmla="*/ 8737412 w 10853928"/>
-              <a:gd name="connsiteY14" fmla="*/ 0 h 18288"/>
-              <a:gd name="connsiteX15" fmla="*/ 9524322 w 10853928"/>
-              <a:gd name="connsiteY15" fmla="*/ 0 h 18288"/>
-              <a:gd name="connsiteX16" fmla="*/ 10853928 w 10853928"/>
-              <a:gd name="connsiteY16" fmla="*/ 0 h 18288"/>
-              <a:gd name="connsiteX17" fmla="*/ 10853928 w 10853928"/>
-              <a:gd name="connsiteY17" fmla="*/ 18288 h 18288"/>
-              <a:gd name="connsiteX18" fmla="*/ 10392636 w 10853928"/>
-              <a:gd name="connsiteY18" fmla="*/ 18288 h 18288"/>
-              <a:gd name="connsiteX19" fmla="*/ 9497187 w 10853928"/>
-              <a:gd name="connsiteY19" fmla="*/ 18288 h 18288"/>
-              <a:gd name="connsiteX20" fmla="*/ 8818817 w 10853928"/>
-              <a:gd name="connsiteY20" fmla="*/ 18288 h 18288"/>
-              <a:gd name="connsiteX21" fmla="*/ 8466064 w 10853928"/>
-              <a:gd name="connsiteY21" fmla="*/ 18288 h 18288"/>
-              <a:gd name="connsiteX22" fmla="*/ 7787693 w 10853928"/>
-              <a:gd name="connsiteY22" fmla="*/ 18288 h 18288"/>
-              <a:gd name="connsiteX23" fmla="*/ 7217862 w 10853928"/>
-              <a:gd name="connsiteY23" fmla="*/ 18288 h 18288"/>
-              <a:gd name="connsiteX24" fmla="*/ 6648031 w 10853928"/>
-              <a:gd name="connsiteY24" fmla="*/ 18288 h 18288"/>
-              <a:gd name="connsiteX25" fmla="*/ 6078200 w 10853928"/>
-              <a:gd name="connsiteY25" fmla="*/ 18288 h 18288"/>
-              <a:gd name="connsiteX26" fmla="*/ 5508368 w 10853928"/>
-              <a:gd name="connsiteY26" fmla="*/ 18288 h 18288"/>
-              <a:gd name="connsiteX27" fmla="*/ 4721459 w 10853928"/>
-              <a:gd name="connsiteY27" fmla="*/ 18288 h 18288"/>
-              <a:gd name="connsiteX28" fmla="*/ 4043088 w 10853928"/>
-              <a:gd name="connsiteY28" fmla="*/ 18288 h 18288"/>
-              <a:gd name="connsiteX29" fmla="*/ 3690336 w 10853928"/>
-              <a:gd name="connsiteY29" fmla="*/ 18288 h 18288"/>
-              <a:gd name="connsiteX30" fmla="*/ 3120504 w 10853928"/>
-              <a:gd name="connsiteY30" fmla="*/ 18288 h 18288"/>
-              <a:gd name="connsiteX31" fmla="*/ 2333595 w 10853928"/>
-              <a:gd name="connsiteY31" fmla="*/ 18288 h 18288"/>
-              <a:gd name="connsiteX32" fmla="*/ 1872303 w 10853928"/>
-              <a:gd name="connsiteY32" fmla="*/ 18288 h 18288"/>
-              <a:gd name="connsiteX33" fmla="*/ 976854 w 10853928"/>
-              <a:gd name="connsiteY33" fmla="*/ 18288 h 18288"/>
-              <a:gd name="connsiteX34" fmla="*/ 0 w 10853928"/>
-              <a:gd name="connsiteY34" fmla="*/ 18288 h 18288"/>
-              <a:gd name="connsiteX35" fmla="*/ 0 w 10853928"/>
-              <a:gd name="connsiteY35" fmla="*/ 0 h 18288"/>
+              <a:gd name="csX0" fmla="*/ 0 w 10853928"/>
+              <a:gd name="csY0" fmla="*/ 0 h 18288"/>
+              <a:gd name="csX1" fmla="*/ 461292 w 10853928"/>
+              <a:gd name="csY1" fmla="*/ 0 h 18288"/>
+              <a:gd name="csX2" fmla="*/ 1139662 w 10853928"/>
+              <a:gd name="csY2" fmla="*/ 0 h 18288"/>
+              <a:gd name="csX3" fmla="*/ 1926572 w 10853928"/>
+              <a:gd name="csY3" fmla="*/ 0 h 18288"/>
+              <a:gd name="csX4" fmla="*/ 2279325 w 10853928"/>
+              <a:gd name="csY4" fmla="*/ 0 h 18288"/>
+              <a:gd name="csX5" fmla="*/ 2632078 w 10853928"/>
+              <a:gd name="csY5" fmla="*/ 0 h 18288"/>
+              <a:gd name="csX6" fmla="*/ 3527527 w 10853928"/>
+              <a:gd name="csY6" fmla="*/ 0 h 18288"/>
+              <a:gd name="csX7" fmla="*/ 4205897 w 10853928"/>
+              <a:gd name="csY7" fmla="*/ 0 h 18288"/>
+              <a:gd name="csX8" fmla="*/ 4558650 w 10853928"/>
+              <a:gd name="csY8" fmla="*/ 0 h 18288"/>
+              <a:gd name="csX9" fmla="*/ 5237020 w 10853928"/>
+              <a:gd name="csY9" fmla="*/ 0 h 18288"/>
+              <a:gd name="csX10" fmla="*/ 6132469 w 10853928"/>
+              <a:gd name="csY10" fmla="*/ 0 h 18288"/>
+              <a:gd name="csX11" fmla="*/ 6702301 w 10853928"/>
+              <a:gd name="csY11" fmla="*/ 0 h 18288"/>
+              <a:gd name="csX12" fmla="*/ 7272132 w 10853928"/>
+              <a:gd name="csY12" fmla="*/ 0 h 18288"/>
+              <a:gd name="csX13" fmla="*/ 7950502 w 10853928"/>
+              <a:gd name="csY13" fmla="*/ 0 h 18288"/>
+              <a:gd name="csX14" fmla="*/ 8737412 w 10853928"/>
+              <a:gd name="csY14" fmla="*/ 0 h 18288"/>
+              <a:gd name="csX15" fmla="*/ 9524322 w 10853928"/>
+              <a:gd name="csY15" fmla="*/ 0 h 18288"/>
+              <a:gd name="csX16" fmla="*/ 10853928 w 10853928"/>
+              <a:gd name="csY16" fmla="*/ 0 h 18288"/>
+              <a:gd name="csX17" fmla="*/ 10853928 w 10853928"/>
+              <a:gd name="csY17" fmla="*/ 18288 h 18288"/>
+              <a:gd name="csX18" fmla="*/ 10392636 w 10853928"/>
+              <a:gd name="csY18" fmla="*/ 18288 h 18288"/>
+              <a:gd name="csX19" fmla="*/ 9497187 w 10853928"/>
+              <a:gd name="csY19" fmla="*/ 18288 h 18288"/>
+              <a:gd name="csX20" fmla="*/ 8818817 w 10853928"/>
+              <a:gd name="csY20" fmla="*/ 18288 h 18288"/>
+              <a:gd name="csX21" fmla="*/ 8466064 w 10853928"/>
+              <a:gd name="csY21" fmla="*/ 18288 h 18288"/>
+              <a:gd name="csX22" fmla="*/ 7787693 w 10853928"/>
+              <a:gd name="csY22" fmla="*/ 18288 h 18288"/>
+              <a:gd name="csX23" fmla="*/ 7217862 w 10853928"/>
+              <a:gd name="csY23" fmla="*/ 18288 h 18288"/>
+              <a:gd name="csX24" fmla="*/ 6648031 w 10853928"/>
+              <a:gd name="csY24" fmla="*/ 18288 h 18288"/>
+              <a:gd name="csX25" fmla="*/ 6078200 w 10853928"/>
+              <a:gd name="csY25" fmla="*/ 18288 h 18288"/>
+              <a:gd name="csX26" fmla="*/ 5508368 w 10853928"/>
+              <a:gd name="csY26" fmla="*/ 18288 h 18288"/>
+              <a:gd name="csX27" fmla="*/ 4721459 w 10853928"/>
+              <a:gd name="csY27" fmla="*/ 18288 h 18288"/>
+              <a:gd name="csX28" fmla="*/ 4043088 w 10853928"/>
+              <a:gd name="csY28" fmla="*/ 18288 h 18288"/>
+              <a:gd name="csX29" fmla="*/ 3690336 w 10853928"/>
+              <a:gd name="csY29" fmla="*/ 18288 h 18288"/>
+              <a:gd name="csX30" fmla="*/ 3120504 w 10853928"/>
+              <a:gd name="csY30" fmla="*/ 18288 h 18288"/>
+              <a:gd name="csX31" fmla="*/ 2333595 w 10853928"/>
+              <a:gd name="csY31" fmla="*/ 18288 h 18288"/>
+              <a:gd name="csX32" fmla="*/ 1872303 w 10853928"/>
+              <a:gd name="csY32" fmla="*/ 18288 h 18288"/>
+              <a:gd name="csX33" fmla="*/ 976854 w 10853928"/>
+              <a:gd name="csY33" fmla="*/ 18288 h 18288"/>
+              <a:gd name="csX34" fmla="*/ 0 w 10853928"/>
+              <a:gd name="csY34" fmla="*/ 18288 h 18288"/>
+              <a:gd name="csX35" fmla="*/ 0 w 10853928"/>
+              <a:gd name="csY35" fmla="*/ 0 h 18288"/>
             </a:gdLst>
             <a:ahLst/>
             <a:cxnLst>
               <a:cxn ang="0">
-                <a:pos x="connsiteX0" y="connsiteY0"/>
-              </a:cxn>
-              <a:cxn ang="0">
-                <a:pos x="connsiteX1" y="connsiteY1"/>
-              </a:cxn>
-              <a:cxn ang="0">
-                <a:pos x="connsiteX2" y="connsiteY2"/>
-              </a:cxn>
-              <a:cxn ang="0">
-                <a:pos x="connsiteX3" y="connsiteY3"/>
-              </a:cxn>
-              <a:cxn ang="0">
-                <a:pos x="connsiteX4" y="connsiteY4"/>
-              </a:cxn>
-              <a:cxn ang="0">
-                <a:pos x="connsiteX5" y="connsiteY5"/>
-              </a:cxn>
-              <a:cxn ang="0">
-                <a:pos x="connsiteX6" y="connsiteY6"/>
-              </a:cxn>
-              <a:cxn ang="0">
-                <a:pos x="connsiteX7" y="connsiteY7"/>
-              </a:cxn>
-              <a:cxn ang="0">
-                <a:pos x="connsiteX8" y="connsiteY8"/>
-              </a:cxn>
-              <a:cxn ang="0">
-                <a:pos x="connsiteX9" y="connsiteY9"/>
-              </a:cxn>
-              <a:cxn ang="0">
-                <a:pos x="connsiteX10" y="connsiteY10"/>
-              </a:cxn>
-              <a:cxn ang="0">
-                <a:pos x="connsiteX11" y="connsiteY11"/>
-              </a:cxn>
-              <a:cxn ang="0">
-                <a:pos x="connsiteX12" y="connsiteY12"/>
-              </a:cxn>
-              <a:cxn ang="0">
-                <a:pos x="connsiteX13" y="connsiteY13"/>
-              </a:cxn>
-              <a:cxn ang="0">
-                <a:pos x="connsiteX14" y="connsiteY14"/>
-              </a:cxn>
-              <a:cxn ang="0">
-                <a:pos x="connsiteX15" y="connsiteY15"/>
-              </a:cxn>
-              <a:cxn ang="0">
-                <a:pos x="connsiteX16" y="connsiteY16"/>
-              </a:cxn>
-              <a:cxn ang="0">
-                <a:pos x="connsiteX17" y="connsiteY17"/>
-              </a:cxn>
-              <a:cxn ang="0">
-                <a:pos x="connsiteX18" y="connsiteY18"/>
-              </a:cxn>
-              <a:cxn ang="0">
-                <a:pos x="connsiteX19" y="connsiteY19"/>
-              </a:cxn>
-              <a:cxn ang="0">
-                <a:pos x="connsiteX20" y="connsiteY20"/>
-              </a:cxn>
-              <a:cxn ang="0">
-                <a:pos x="connsiteX21" y="connsiteY21"/>
-              </a:cxn>
-              <a:cxn ang="0">
-                <a:pos x="connsiteX22" y="connsiteY22"/>
-              </a:cxn>
-              <a:cxn ang="0">
-                <a:pos x="connsiteX23" y="connsiteY23"/>
-              </a:cxn>
-              <a:cxn ang="0">
-                <a:pos x="connsiteX24" y="connsiteY24"/>
-              </a:cxn>
-              <a:cxn ang="0">
-                <a:pos x="connsiteX25" y="connsiteY25"/>
-              </a:cxn>
-              <a:cxn ang="0">
-                <a:pos x="connsiteX26" y="connsiteY26"/>
-              </a:cxn>
-              <a:cxn ang="0">
-                <a:pos x="connsiteX27" y="connsiteY27"/>
-              </a:cxn>
-              <a:cxn ang="0">
-                <a:pos x="connsiteX28" y="connsiteY28"/>
-              </a:cxn>
-              <a:cxn ang="0">
-                <a:pos x="connsiteX29" y="connsiteY29"/>
-              </a:cxn>
-              <a:cxn ang="0">
-                <a:pos x="connsiteX30" y="connsiteY30"/>
-              </a:cxn>
-              <a:cxn ang="0">
-                <a:pos x="connsiteX31" y="connsiteY31"/>
-              </a:cxn>
-              <a:cxn ang="0">
-                <a:pos x="connsiteX32" y="connsiteY32"/>
-              </a:cxn>
-              <a:cxn ang="0">
-                <a:pos x="connsiteX33" y="connsiteY33"/>
-              </a:cxn>
-              <a:cxn ang="0">
-                <a:pos x="connsiteX34" y="connsiteY34"/>
-              </a:cxn>
-              <a:cxn ang="0">
-                <a:pos x="connsiteX35" y="connsiteY35"/>
+                <a:pos x="csX0" y="csY0"/>
+              </a:cxn>
+              <a:cxn ang="0">
+                <a:pos x="csX1" y="csY1"/>
+              </a:cxn>
+              <a:cxn ang="0">
+                <a:pos x="csX2" y="csY2"/>
+              </a:cxn>
+              <a:cxn ang="0">
+                <a:pos x="csX3" y="csY3"/>
+              </a:cxn>
+              <a:cxn ang="0">
+                <a:pos x="csX4" y="csY4"/>
+              </a:cxn>
+              <a:cxn ang="0">
+                <a:pos x="csX5" y="csY5"/>
+              </a:cxn>
+              <a:cxn ang="0">
+                <a:pos x="csX6" y="csY6"/>
+              </a:cxn>
+              <a:cxn ang="0">
+                <a:pos x="csX7" y="csY7"/>
+              </a:cxn>
+              <a:cxn ang="0">
+                <a:pos x="csX8" y="csY8"/>
+              </a:cxn>
+              <a:cxn ang="0">
+                <a:pos x="csX9" y="csY9"/>
+              </a:cxn>
+              <a:cxn ang="0">
+                <a:pos x="csX10" y="csY10"/>
+              </a:cxn>
+              <a:cxn ang="0">
+                <a:pos x="csX11" y="csY11"/>
+              </a:cxn>
+              <a:cxn ang="0">
+                <a:pos x="csX12" y="csY12"/>
+              </a:cxn>
+              <a:cxn ang="0">
+                <a:pos x="csX13" y="csY13"/>
+              </a:cxn>
+              <a:cxn ang="0">
+                <a:pos x="csX14" y="csY14"/>
+              </a:cxn>
+              <a:cxn ang="0">
+                <a:pos x="csX15" y="csY15"/>
+              </a:cxn>
+              <a:cxn ang="0">
+                <a:pos x="csX16" y="csY16"/>
+              </a:cxn>
+              <a:cxn ang="0">
+                <a:pos x="csX17" y="csY17"/>
+              </a:cxn>
+              <a:cxn ang="0">
+                <a:pos x="csX18" y="csY18"/>
+              </a:cxn>
+              <a:cxn ang="0">
+                <a:pos x="csX19" y="csY19"/>
+              </a:cxn>
+              <a:cxn ang="0">
+                <a:pos x="csX20" y="csY20"/>
+              </a:cxn>
+              <a:cxn ang="0">
+                <a:pos x="csX21" y="csY21"/>
+              </a:cxn>
+              <a:cxn ang="0">
+                <a:pos x="csX22" y="csY22"/>
+              </a:cxn>
+              <a:cxn ang="0">
+                <a:pos x="csX23" y="csY23"/>
+              </a:cxn>
+              <a:cxn ang="0">
+                <a:pos x="csX24" y="csY24"/>
+              </a:cxn>
+              <a:cxn ang="0">
+                <a:pos x="csX25" y="csY25"/>
+              </a:cxn>
+              <a:cxn ang="0">
+                <a:pos x="csX26" y="csY26"/>
+              </a:cxn>
+              <a:cxn ang="0">
+                <a:pos x="csX27" y="csY27"/>
+              </a:cxn>
+              <a:cxn ang="0">
+                <a:pos x="csX28" y="csY28"/>
+              </a:cxn>
+              <a:cxn ang="0">
+                <a:pos x="csX29" y="csY29"/>
+              </a:cxn>
+              <a:cxn ang="0">
+                <a:pos x="csX30" y="csY30"/>
+              </a:cxn>
+              <a:cxn ang="0">
+                <a:pos x="csX31" y="csY31"/>
+              </a:cxn>
+              <a:cxn ang="0">
+                <a:pos x="csX32" y="csY32"/>
+              </a:cxn>
+              <a:cxn ang="0">
+                <a:pos x="csX33" y="csY33"/>
+              </a:cxn>
+              <a:cxn ang="0">
+                <a:pos x="csX34" y="csY34"/>
+              </a:cxn>
+              <a:cxn ang="0">
+                <a:pos x="csX35" y="csY35"/>
               </a:cxn>
             </a:cxnLst>
             <a:rect l="l" t="t" r="r" b="b"/>
